--- a/neerlandais1/powerpoints/Module_13_Niet_of_geen.pptx
+++ b/neerlandais1/powerpoints/Module_13_Niet_of_geen.pptx
@@ -131,18 +131,18 @@
   <p:extLst>
     <p:ext uri="{521415D9-36F7-43E2-AB2F-B90AF26B5E84}">
       <p14:sectionLst xmlns:p14="http://schemas.microsoft.com/office/powerpoint/2010/main">
-        <p14:section name="Ouverture" id="{135308d3-b20b-9a4c-4ad8-d4554b41918f}">
+        <p14:section name="Ouverture" id="{1bc967a8-dd66-5e2d-785c-49d98c01046d}">
           <p14:sldIdLst>
             <p14:sldId id="256"/>
           </p14:sldIdLst>
         </p14:section>
-        <p14:section name="Découvrir" id="{a65e200e-c9d9-ff30-7874-52de66640624}">
+        <p14:section name="Découvrir" id="{190dc89e-70dc-eee1-8e3f-26887084f8a5}">
           <p14:sldIdLst>
             <p14:sldId id="257"/>
             <p14:sldId id="258"/>
           </p14:sldIdLst>
         </p14:section>
-        <p14:section name="Comprendre" id="{c3eb1048-2289-0455-7663-e133a2446c5f}">
+        <p14:section name="Comprendre" id="{acd6667b-0aab-6fc2-d433-f3740df90e37}">
           <p14:sldIdLst>
             <p14:sldId id="259"/>
             <p14:sldId id="260"/>
@@ -156,7 +156,7 @@
             <p14:sldId id="268"/>
           </p14:sldIdLst>
         </p14:section>
-        <p14:section name="JIJ NU ! — Oefeningen" id="{65f9821f-c266-1656-91ab-a54fabc282f5}">
+        <p14:section name="JIJ NU ! — Oefeningen" id="{20564d6b-48d3-c58f-5099-aa1e7d57466d}">
           <p14:sldIdLst>
             <p14:sldId id="269"/>
             <p14:sldId id="270"/>
@@ -171,7 +171,7 @@
             <p14:sldId id="279"/>
           </p14:sldIdLst>
         </p14:section>
-        <p14:section name="Clôture" id="{7293ed4f-12c9-7294-3709-88e611453c75}">
+        <p14:section name="Clôture" id="{fe1c8e97-088f-d9a3-c4aa-f2c534767376}">
           <p14:sldIdLst>
             <p14:sldId id="280"/>
           </p14:sldIdLst>
@@ -3622,7 +3622,7 @@
                   <a:srgbClr val="FFFFFF"/>
                 </a:solidFill>
               </a:rPr>
-              <a:t>MODULE 13 / 15</a:t>
+              <a:t>MODULE 13 / 19</a:t>
             </a:r>
             <a:endParaRPr lang="en-US" sz="1400" dirty="0"/>
           </a:p>

--- a/neerlandais1/powerpoints/Module_13_Niet_of_geen.pptx
+++ b/neerlandais1/powerpoints/Module_13_Niet_of_geen.pptx
@@ -131,18 +131,18 @@
   <p:extLst>
     <p:ext uri="{521415D9-36F7-43E2-AB2F-B90AF26B5E84}">
       <p14:sectionLst xmlns:p14="http://schemas.microsoft.com/office/powerpoint/2010/main">
-        <p14:section name="Ouverture" id="{1bc967a8-dd66-5e2d-785c-49d98c01046d}">
+        <p14:section name="Ouverture" id="{e539f397-c1b2-9164-4e6a-c1d891032189}">
           <p14:sldIdLst>
             <p14:sldId id="256"/>
           </p14:sldIdLst>
         </p14:section>
-        <p14:section name="Découvrir" id="{190dc89e-70dc-eee1-8e3f-26887084f8a5}">
+        <p14:section name="Découvrir" id="{801c3a16-018c-f95b-ed8f-f3e86f370786}">
           <p14:sldIdLst>
             <p14:sldId id="257"/>
             <p14:sldId id="258"/>
           </p14:sldIdLst>
         </p14:section>
-        <p14:section name="Comprendre" id="{acd6667b-0aab-6fc2-d433-f3740df90e37}">
+        <p14:section name="Comprendre" id="{72020fb0-28f2-13f7-4d62-a138e6b13efe}">
           <p14:sldIdLst>
             <p14:sldId id="259"/>
             <p14:sldId id="260"/>
@@ -156,7 +156,7 @@
             <p14:sldId id="268"/>
           </p14:sldIdLst>
         </p14:section>
-        <p14:section name="JIJ NU ! — Oefeningen" id="{20564d6b-48d3-c58f-5099-aa1e7d57466d}">
+        <p14:section name="JIJ NU ! — Oefeningen" id="{304e6da5-975a-0c55-faf3-5c6e06fc7244}">
           <p14:sldIdLst>
             <p14:sldId id="269"/>
             <p14:sldId id="270"/>
@@ -171,7 +171,7 @@
             <p14:sldId id="279"/>
           </p14:sldIdLst>
         </p14:section>
-        <p14:section name="Clôture" id="{fe1c8e97-088f-d9a3-c4aa-f2c534767376}">
+        <p14:section name="Clôture" id="{b4379b52-2df6-aad1-c280-68eeb3eb32c3}">
           <p14:sldIdLst>
             <p14:sldId id="280"/>
           </p14:sldIdLst>
@@ -3622,7 +3622,7 @@
                   <a:srgbClr val="FFFFFF"/>
                 </a:solidFill>
               </a:rPr>
-              <a:t>MODULE 13 / 19</a:t>
+              <a:t>MODULE 13 / 24</a:t>
             </a:r>
             <a:endParaRPr lang="en-US" sz="1400" dirty="0"/>
           </a:p>

--- a/neerlandais1/powerpoints/Module_13_Niet_of_geen.pptx
+++ b/neerlandais1/powerpoints/Module_13_Niet_of_geen.pptx
@@ -131,18 +131,18 @@
   <p:extLst>
     <p:ext uri="{521415D9-36F7-43E2-AB2F-B90AF26B5E84}">
       <p14:sectionLst xmlns:p14="http://schemas.microsoft.com/office/powerpoint/2010/main">
-        <p14:section name="Ouverture" id="{e539f397-c1b2-9164-4e6a-c1d891032189}">
+        <p14:section name="Ouverture" id="{f95e0515-aad7-ae09-80d0-95b31f31134a}">
           <p14:sldIdLst>
             <p14:sldId id="256"/>
           </p14:sldIdLst>
         </p14:section>
-        <p14:section name="Découvrir" id="{801c3a16-018c-f95b-ed8f-f3e86f370786}">
+        <p14:section name="Découvrir" id="{2ab5e9f0-dc03-e708-ae4b-f20fa2fb7611}">
           <p14:sldIdLst>
             <p14:sldId id="257"/>
             <p14:sldId id="258"/>
           </p14:sldIdLst>
         </p14:section>
-        <p14:section name="Comprendre" id="{72020fb0-28f2-13f7-4d62-a138e6b13efe}">
+        <p14:section name="Comprendre" id="{b5de0268-06c5-8403-3e7d-d549d9387311}">
           <p14:sldIdLst>
             <p14:sldId id="259"/>
             <p14:sldId id="260"/>
@@ -156,7 +156,7 @@
             <p14:sldId id="268"/>
           </p14:sldIdLst>
         </p14:section>
-        <p14:section name="JIJ NU ! — Oefeningen" id="{304e6da5-975a-0c55-faf3-5c6e06fc7244}">
+        <p14:section name="JIJ NU ! — Oefeningen" id="{4fdcb141-f464-1a26-1d88-fd92f42d1c37}">
           <p14:sldIdLst>
             <p14:sldId id="269"/>
             <p14:sldId id="270"/>
@@ -171,7 +171,7 @@
             <p14:sldId id="279"/>
           </p14:sldIdLst>
         </p14:section>
-        <p14:section name="Clôture" id="{b4379b52-2df6-aad1-c280-68eeb3eb32c3}">
+        <p14:section name="Clôture" id="{6eb13b54-190a-5de5-33ac-c88b4ba7f993}">
           <p14:sldIdLst>
             <p14:sldId id="280"/>
           </p14:sldIdLst>
@@ -3622,7 +3622,7 @@
                   <a:srgbClr val="FFFFFF"/>
                 </a:solidFill>
               </a:rPr>
-              <a:t>MODULE 13 / 24</a:t>
+              <a:t>MODULE 13 / 29</a:t>
             </a:r>
             <a:endParaRPr lang="en-US" sz="1400" dirty="0"/>
           </a:p>

--- a/neerlandais1/powerpoints/Module_13_Niet_of_geen.pptx
+++ b/neerlandais1/powerpoints/Module_13_Niet_of_geen.pptx
@@ -131,18 +131,18 @@
   <p:extLst>
     <p:ext uri="{521415D9-36F7-43E2-AB2F-B90AF26B5E84}">
       <p14:sectionLst xmlns:p14="http://schemas.microsoft.com/office/powerpoint/2010/main">
-        <p14:section name="Ouverture" id="{f95e0515-aad7-ae09-80d0-95b31f31134a}">
+        <p14:section name="Ouverture" id="{b11b570d-4f34-b2a3-b5c5-a5001a6ef308}">
           <p14:sldIdLst>
             <p14:sldId id="256"/>
           </p14:sldIdLst>
         </p14:section>
-        <p14:section name="Découvrir" id="{2ab5e9f0-dc03-e708-ae4b-f20fa2fb7611}">
+        <p14:section name="Découvrir" id="{299433fb-4297-7ac2-fe92-fcaa4b0875f8}">
           <p14:sldIdLst>
             <p14:sldId id="257"/>
             <p14:sldId id="258"/>
           </p14:sldIdLst>
         </p14:section>
-        <p14:section name="Comprendre" id="{b5de0268-06c5-8403-3e7d-d549d9387311}">
+        <p14:section name="Comprendre" id="{dbdbedff-ca07-d67d-e154-0a9c27714623}">
           <p14:sldIdLst>
             <p14:sldId id="259"/>
             <p14:sldId id="260"/>
@@ -156,7 +156,7 @@
             <p14:sldId id="268"/>
           </p14:sldIdLst>
         </p14:section>
-        <p14:section name="JIJ NU ! — Oefeningen" id="{4fdcb141-f464-1a26-1d88-fd92f42d1c37}">
+        <p14:section name="JIJ NU ! — Oefeningen" id="{7ee43cd9-b8a6-00f9-e407-2874d004ef4a}">
           <p14:sldIdLst>
             <p14:sldId id="269"/>
             <p14:sldId id="270"/>
@@ -171,7 +171,7 @@
             <p14:sldId id="279"/>
           </p14:sldIdLst>
         </p14:section>
-        <p14:section name="Clôture" id="{6eb13b54-190a-5de5-33ac-c88b4ba7f993}">
+        <p14:section name="Clôture" id="{68aa3a4c-d52c-063d-38b2-b078b6c15fdf}">
           <p14:sldIdLst>
             <p14:sldId id="280"/>
           </p14:sldIdLst>
@@ -3622,7 +3622,7 @@
                   <a:srgbClr val="FFFFFF"/>
                 </a:solidFill>
               </a:rPr>
-              <a:t>MODULE 13 / 29</a:t>
+              <a:t>MODULE 13 / 32</a:t>
             </a:r>
             <a:endParaRPr lang="en-US" sz="1400" dirty="0"/>
           </a:p>

--- a/neerlandais1/powerpoints/Module_13_Niet_of_geen.pptx
+++ b/neerlandais1/powerpoints/Module_13_Niet_of_geen.pptx
@@ -131,18 +131,18 @@
   <p:extLst>
     <p:ext uri="{521415D9-36F7-43E2-AB2F-B90AF26B5E84}">
       <p14:sectionLst xmlns:p14="http://schemas.microsoft.com/office/powerpoint/2010/main">
-        <p14:section name="Ouverture" id="{b11b570d-4f34-b2a3-b5c5-a5001a6ef308}">
+        <p14:section name="Ouverture" id="{7532d78e-72c3-8868-6b2e-a5de65b7f8fd}">
           <p14:sldIdLst>
             <p14:sldId id="256"/>
           </p14:sldIdLst>
         </p14:section>
-        <p14:section name="Découvrir" id="{299433fb-4297-7ac2-fe92-fcaa4b0875f8}">
+        <p14:section name="Découvrir" id="{05120227-f6eb-6e42-848c-947b902c1d68}">
           <p14:sldIdLst>
             <p14:sldId id="257"/>
             <p14:sldId id="258"/>
           </p14:sldIdLst>
         </p14:section>
-        <p14:section name="Comprendre" id="{dbdbedff-ca07-d67d-e154-0a9c27714623}">
+        <p14:section name="Comprendre" id="{3da451c7-676a-10b1-c977-bc4d9cae536b}">
           <p14:sldIdLst>
             <p14:sldId id="259"/>
             <p14:sldId id="260"/>
@@ -156,7 +156,7 @@
             <p14:sldId id="268"/>
           </p14:sldIdLst>
         </p14:section>
-        <p14:section name="JIJ NU ! — Oefeningen" id="{7ee43cd9-b8a6-00f9-e407-2874d004ef4a}">
+        <p14:section name="JIJ NU ! — Oefeningen" id="{6d3677e9-67e0-a053-7228-f6f69c987cb9}">
           <p14:sldIdLst>
             <p14:sldId id="269"/>
             <p14:sldId id="270"/>
@@ -171,7 +171,7 @@
             <p14:sldId id="279"/>
           </p14:sldIdLst>
         </p14:section>
-        <p14:section name="Clôture" id="{68aa3a4c-d52c-063d-38b2-b078b6c15fdf}">
+        <p14:section name="Clôture" id="{91e02c7a-19ea-bd58-e669-b454b67f1f2e}">
           <p14:sldIdLst>
             <p14:sldId id="280"/>
           </p14:sldIdLst>

--- a/neerlandais1/powerpoints/Module_13_Niet_of_geen.pptx
+++ b/neerlandais1/powerpoints/Module_13_Niet_of_geen.pptx
@@ -131,18 +131,18 @@
   <p:extLst>
     <p:ext uri="{521415D9-36F7-43E2-AB2F-B90AF26B5E84}">
       <p14:sectionLst xmlns:p14="http://schemas.microsoft.com/office/powerpoint/2010/main">
-        <p14:section name="Ouverture" id="{7532d78e-72c3-8868-6b2e-a5de65b7f8fd}">
+        <p14:section name="Ouverture" id="{2e2b64c4-8738-0e81-3a77-1c6952a75044}">
           <p14:sldIdLst>
             <p14:sldId id="256"/>
           </p14:sldIdLst>
         </p14:section>
-        <p14:section name="Découvrir" id="{05120227-f6eb-6e42-848c-947b902c1d68}">
+        <p14:section name="Découvrir" id="{86035bfb-3176-aced-59d6-ba8a4af5c51f}">
           <p14:sldIdLst>
             <p14:sldId id="257"/>
             <p14:sldId id="258"/>
           </p14:sldIdLst>
         </p14:section>
-        <p14:section name="Comprendre" id="{3da451c7-676a-10b1-c977-bc4d9cae536b}">
+        <p14:section name="Comprendre" id="{473c53ae-9320-4546-b5ed-f4a1897f6da5}">
           <p14:sldIdLst>
             <p14:sldId id="259"/>
             <p14:sldId id="260"/>
@@ -156,7 +156,7 @@
             <p14:sldId id="268"/>
           </p14:sldIdLst>
         </p14:section>
-        <p14:section name="JIJ NU ! — Oefeningen" id="{6d3677e9-67e0-a053-7228-f6f69c987cb9}">
+        <p14:section name="JIJ NU ! — Oefeningen" id="{34d29cdd-ca5a-c7dd-b69e-72993cd4c735}">
           <p14:sldIdLst>
             <p14:sldId id="269"/>
             <p14:sldId id="270"/>
@@ -171,7 +171,7 @@
             <p14:sldId id="279"/>
           </p14:sldIdLst>
         </p14:section>
-        <p14:section name="Clôture" id="{91e02c7a-19ea-bd58-e669-b454b67f1f2e}">
+        <p14:section name="Clôture" id="{20cec125-fb7c-f37c-b673-05779224529f}">
           <p14:sldIdLst>
             <p14:sldId id="280"/>
           </p14:sldIdLst>

--- a/neerlandais1/powerpoints/Module_13_Niet_of_geen.pptx
+++ b/neerlandais1/powerpoints/Module_13_Niet_of_geen.pptx
@@ -131,18 +131,18 @@
   <p:extLst>
     <p:ext uri="{521415D9-36F7-43E2-AB2F-B90AF26B5E84}">
       <p14:sectionLst xmlns:p14="http://schemas.microsoft.com/office/powerpoint/2010/main">
-        <p14:section name="Ouverture" id="{2e2b64c4-8738-0e81-3a77-1c6952a75044}">
+        <p14:section name="Ouverture" id="{c0b24697-8833-3775-7ea1-d657afa9b020}">
           <p14:sldIdLst>
             <p14:sldId id="256"/>
           </p14:sldIdLst>
         </p14:section>
-        <p14:section name="Découvrir" id="{86035bfb-3176-aced-59d6-ba8a4af5c51f}">
+        <p14:section name="Découvrir" id="{986628e0-dc74-e657-6aea-61c7c4d57b5c}">
           <p14:sldIdLst>
             <p14:sldId id="257"/>
             <p14:sldId id="258"/>
           </p14:sldIdLst>
         </p14:section>
-        <p14:section name="Comprendre" id="{473c53ae-9320-4546-b5ed-f4a1897f6da5}">
+        <p14:section name="Comprendre" id="{5af633d4-a500-66cd-1edb-6850f3deb146}">
           <p14:sldIdLst>
             <p14:sldId id="259"/>
             <p14:sldId id="260"/>
@@ -156,7 +156,7 @@
             <p14:sldId id="268"/>
           </p14:sldIdLst>
         </p14:section>
-        <p14:section name="JIJ NU ! — Oefeningen" id="{34d29cdd-ca5a-c7dd-b69e-72993cd4c735}">
+        <p14:section name="JIJ NU ! — Oefeningen" id="{838127bc-b489-278b-d16c-43794882305e}">
           <p14:sldIdLst>
             <p14:sldId id="269"/>
             <p14:sldId id="270"/>
@@ -171,7 +171,7 @@
             <p14:sldId id="279"/>
           </p14:sldIdLst>
         </p14:section>
-        <p14:section name="Clôture" id="{20cec125-fb7c-f37c-b673-05779224529f}">
+        <p14:section name="Clôture" id="{b4cae1ac-01df-da33-9f80-f1a999a0eab5}">
           <p14:sldIdLst>
             <p14:sldId id="280"/>
           </p14:sldIdLst>

--- a/neerlandais1/powerpoints/Module_13_Niet_of_geen.pptx
+++ b/neerlandais1/powerpoints/Module_13_Niet_of_geen.pptx
@@ -131,18 +131,18 @@
   <p:extLst>
     <p:ext uri="{521415D9-36F7-43E2-AB2F-B90AF26B5E84}">
       <p14:sectionLst xmlns:p14="http://schemas.microsoft.com/office/powerpoint/2010/main">
-        <p14:section name="Ouverture" id="{c0b24697-8833-3775-7ea1-d657afa9b020}">
+        <p14:section name="Ouverture" id="{66cea04c-f2e5-1437-8c5d-b461d0c90b14}">
           <p14:sldIdLst>
             <p14:sldId id="256"/>
           </p14:sldIdLst>
         </p14:section>
-        <p14:section name="Découvrir" id="{986628e0-dc74-e657-6aea-61c7c4d57b5c}">
+        <p14:section name="Découvrir" id="{f65e9329-81b9-058b-a6ef-c1b43e377393}">
           <p14:sldIdLst>
             <p14:sldId id="257"/>
             <p14:sldId id="258"/>
           </p14:sldIdLst>
         </p14:section>
-        <p14:section name="Comprendre" id="{5af633d4-a500-66cd-1edb-6850f3deb146}">
+        <p14:section name="Comprendre" id="{e7f5d37f-0302-8324-3d47-47ef7d933f7f}">
           <p14:sldIdLst>
             <p14:sldId id="259"/>
             <p14:sldId id="260"/>
@@ -156,7 +156,7 @@
             <p14:sldId id="268"/>
           </p14:sldIdLst>
         </p14:section>
-        <p14:section name="JIJ NU ! — Oefeningen" id="{838127bc-b489-278b-d16c-43794882305e}">
+        <p14:section name="JIJ NU ! — Oefeningen" id="{fa825e99-365d-af11-37cd-fd1fc44c7658}">
           <p14:sldIdLst>
             <p14:sldId id="269"/>
             <p14:sldId id="270"/>
@@ -171,7 +171,7 @@
             <p14:sldId id="279"/>
           </p14:sldIdLst>
         </p14:section>
-        <p14:section name="Clôture" id="{b4cae1ac-01df-da33-9f80-f1a999a0eab5}">
+        <p14:section name="Clôture" id="{6c3ea272-71ae-79e4-99a4-043e8c08f63e}">
           <p14:sldIdLst>
             <p14:sldId id="280"/>
           </p14:sldIdLst>

--- a/neerlandais1/powerpoints/Module_13_Niet_of_geen.pptx
+++ b/neerlandais1/powerpoints/Module_13_Niet_of_geen.pptx
@@ -131,18 +131,18 @@
   <p:extLst>
     <p:ext uri="{521415D9-36F7-43E2-AB2F-B90AF26B5E84}">
       <p14:sectionLst xmlns:p14="http://schemas.microsoft.com/office/powerpoint/2010/main">
-        <p14:section name="Ouverture" id="{66cea04c-f2e5-1437-8c5d-b461d0c90b14}">
+        <p14:section name="Ouverture" id="{187f40cd-29b1-5380-5c9f-e8405208a8cd}">
           <p14:sldIdLst>
             <p14:sldId id="256"/>
           </p14:sldIdLst>
         </p14:section>
-        <p14:section name="Découvrir" id="{f65e9329-81b9-058b-a6ef-c1b43e377393}">
+        <p14:section name="Découvrir" id="{748411fe-073b-7c65-4a4c-e76a84610752}">
           <p14:sldIdLst>
             <p14:sldId id="257"/>
             <p14:sldId id="258"/>
           </p14:sldIdLst>
         </p14:section>
-        <p14:section name="Comprendre" id="{e7f5d37f-0302-8324-3d47-47ef7d933f7f}">
+        <p14:section name="Comprendre" id="{90f54968-b375-cbb7-c9ae-a71523f86ad1}">
           <p14:sldIdLst>
             <p14:sldId id="259"/>
             <p14:sldId id="260"/>
@@ -156,7 +156,7 @@
             <p14:sldId id="268"/>
           </p14:sldIdLst>
         </p14:section>
-        <p14:section name="JIJ NU ! — Oefeningen" id="{fa825e99-365d-af11-37cd-fd1fc44c7658}">
+        <p14:section name="JIJ NU ! — Oefeningen" id="{001d3301-e568-86ea-a9c9-c98e37bdd4b1}">
           <p14:sldIdLst>
             <p14:sldId id="269"/>
             <p14:sldId id="270"/>
@@ -171,7 +171,7 @@
             <p14:sldId id="279"/>
           </p14:sldIdLst>
         </p14:section>
-        <p14:section name="Clôture" id="{6c3ea272-71ae-79e4-99a4-043e8c08f63e}">
+        <p14:section name="Clôture" id="{5a14a559-fadb-5802-e82a-8ea713a62b32}">
           <p14:sldIdLst>
             <p14:sldId id="280"/>
           </p14:sldIdLst>

--- a/neerlandais1/powerpoints/Module_13_Niet_of_geen.pptx
+++ b/neerlandais1/powerpoints/Module_13_Niet_of_geen.pptx
@@ -131,18 +131,18 @@
   <p:extLst>
     <p:ext uri="{521415D9-36F7-43E2-AB2F-B90AF26B5E84}">
       <p14:sectionLst xmlns:p14="http://schemas.microsoft.com/office/powerpoint/2010/main">
-        <p14:section name="Ouverture" id="{187f40cd-29b1-5380-5c9f-e8405208a8cd}">
+        <p14:section name="Ouverture" id="{a8f8363e-5b2c-032b-2ed6-1757af5fdd9d}">
           <p14:sldIdLst>
             <p14:sldId id="256"/>
           </p14:sldIdLst>
         </p14:section>
-        <p14:section name="Découvrir" id="{748411fe-073b-7c65-4a4c-e76a84610752}">
+        <p14:section name="Découvrir" id="{ab2c18b2-878b-0de7-40d7-fb0f2c0dffe8}">
           <p14:sldIdLst>
             <p14:sldId id="257"/>
             <p14:sldId id="258"/>
           </p14:sldIdLst>
         </p14:section>
-        <p14:section name="Comprendre" id="{90f54968-b375-cbb7-c9ae-a71523f86ad1}">
+        <p14:section name="Comprendre" id="{17838fab-38a7-0e19-722e-00ad8402a573}">
           <p14:sldIdLst>
             <p14:sldId id="259"/>
             <p14:sldId id="260"/>
@@ -156,7 +156,7 @@
             <p14:sldId id="268"/>
           </p14:sldIdLst>
         </p14:section>
-        <p14:section name="JIJ NU ! — Oefeningen" id="{001d3301-e568-86ea-a9c9-c98e37bdd4b1}">
+        <p14:section name="JIJ NU ! — Oefeningen" id="{7d262b7e-7e07-2b92-6629-6dd3bece03b0}">
           <p14:sldIdLst>
             <p14:sldId id="269"/>
             <p14:sldId id="270"/>
@@ -171,7 +171,7 @@
             <p14:sldId id="279"/>
           </p14:sldIdLst>
         </p14:section>
-        <p14:section name="Clôture" id="{5a14a559-fadb-5802-e82a-8ea713a62b32}">
+        <p14:section name="Clôture" id="{f17eecbd-6044-543f-1b7a-1318856833bd}">
           <p14:sldIdLst>
             <p14:sldId id="280"/>
           </p14:sldIdLst>

--- a/neerlandais1/powerpoints/Module_13_Niet_of_geen.pptx
+++ b/neerlandais1/powerpoints/Module_13_Niet_of_geen.pptx
@@ -131,18 +131,18 @@
   <p:extLst>
     <p:ext uri="{521415D9-36F7-43E2-AB2F-B90AF26B5E84}">
       <p14:sectionLst xmlns:p14="http://schemas.microsoft.com/office/powerpoint/2010/main">
-        <p14:section name="Ouverture" id="{a8f8363e-5b2c-032b-2ed6-1757af5fdd9d}">
+        <p14:section name="Ouverture" id="{7c2c1813-0e4d-4b73-ecdc-79721384bd01}">
           <p14:sldIdLst>
             <p14:sldId id="256"/>
           </p14:sldIdLst>
         </p14:section>
-        <p14:section name="Découvrir" id="{ab2c18b2-878b-0de7-40d7-fb0f2c0dffe8}">
+        <p14:section name="Découvrir" id="{e80af067-231e-4c6f-1aa4-8196c5f7f7ec}">
           <p14:sldIdLst>
             <p14:sldId id="257"/>
             <p14:sldId id="258"/>
           </p14:sldIdLst>
         </p14:section>
-        <p14:section name="Comprendre" id="{17838fab-38a7-0e19-722e-00ad8402a573}">
+        <p14:section name="Comprendre" id="{628b3aa3-ae6e-ba58-e003-3b42443b31b1}">
           <p14:sldIdLst>
             <p14:sldId id="259"/>
             <p14:sldId id="260"/>
@@ -156,7 +156,7 @@
             <p14:sldId id="268"/>
           </p14:sldIdLst>
         </p14:section>
-        <p14:section name="JIJ NU ! — Oefeningen" id="{7d262b7e-7e07-2b92-6629-6dd3bece03b0}">
+        <p14:section name="JIJ NU ! — Oefeningen" id="{0a3c598e-ed82-c55c-e3cc-34f89642e865}">
           <p14:sldIdLst>
             <p14:sldId id="269"/>
             <p14:sldId id="270"/>
@@ -171,7 +171,7 @@
             <p14:sldId id="279"/>
           </p14:sldIdLst>
         </p14:section>
-        <p14:section name="Clôture" id="{f17eecbd-6044-543f-1b7a-1318856833bd}">
+        <p14:section name="Clôture" id="{e8eed038-6f3d-bb74-d325-0e1d216d2dba}">
           <p14:sldIdLst>
             <p14:sldId id="280"/>
           </p14:sldIdLst>

--- a/neerlandais1/powerpoints/Module_13_Niet_of_geen.pptx
+++ b/neerlandais1/powerpoints/Module_13_Niet_of_geen.pptx
@@ -131,18 +131,18 @@
   <p:extLst>
     <p:ext uri="{521415D9-36F7-43E2-AB2F-B90AF26B5E84}">
       <p14:sectionLst xmlns:p14="http://schemas.microsoft.com/office/powerpoint/2010/main">
-        <p14:section name="Ouverture" id="{7c2c1813-0e4d-4b73-ecdc-79721384bd01}">
+        <p14:section name="Ouverture" id="{f871c593-4a1a-38ec-369b-b2b5e980dd05}">
           <p14:sldIdLst>
             <p14:sldId id="256"/>
           </p14:sldIdLst>
         </p14:section>
-        <p14:section name="Découvrir" id="{e80af067-231e-4c6f-1aa4-8196c5f7f7ec}">
+        <p14:section name="Découvrir" id="{1087cca4-7698-15af-845f-490a86ea5f13}">
           <p14:sldIdLst>
             <p14:sldId id="257"/>
             <p14:sldId id="258"/>
           </p14:sldIdLst>
         </p14:section>
-        <p14:section name="Comprendre" id="{628b3aa3-ae6e-ba58-e003-3b42443b31b1}">
+        <p14:section name="Comprendre" id="{482cbf8b-4c9e-1784-df3b-ce3ca5ee5aa9}">
           <p14:sldIdLst>
             <p14:sldId id="259"/>
             <p14:sldId id="260"/>
@@ -156,7 +156,7 @@
             <p14:sldId id="268"/>
           </p14:sldIdLst>
         </p14:section>
-        <p14:section name="JIJ NU ! — Oefeningen" id="{0a3c598e-ed82-c55c-e3cc-34f89642e865}">
+        <p14:section name="JIJ NU ! — Oefeningen" id="{3b392f70-e0cb-3630-30a5-103c30933360}">
           <p14:sldIdLst>
             <p14:sldId id="269"/>
             <p14:sldId id="270"/>
@@ -171,7 +171,7 @@
             <p14:sldId id="279"/>
           </p14:sldIdLst>
         </p14:section>
-        <p14:section name="Clôture" id="{e8eed038-6f3d-bb74-d325-0e1d216d2dba}">
+        <p14:section name="Clôture" id="{b395cc4f-c127-6fe3-989b-fe6157497deb}">
           <p14:sldIdLst>
             <p14:sldId id="280"/>
           </p14:sldIdLst>
